--- a/output/archive/MerrivossData/Client_Work/AT15/MV-2015-240/MV-2015-240_Readout_122115_R1.pptx
+++ b/output/archive/MerrivossData/Client_Work/AT15/MV-2015-240/MV-2015-240_Readout_122115_R1.pptx
@@ -583,7 +583,7 @@
           <a:lstStyle/>
           <a:p>
             <a:r>
-              <a:t>Route comparison assumes comparable assay performance and sufficiently linear disposition over the dose range. The supplied data are derived parameters, not concentration-time profiles.</a:t>
+              <a:t>Route comparison assumes comparable assay performance and sufficiently linear disposition over the dose range. Individual concentration-time profiles are held in the bioanalytical data package; this deck shows derived parameters only.</a:t>
             </a:r>
           </a:p>
         </p:txBody>
